--- a/classes/parte-6-analisis-de-malware/160-reporte-de-analisis-de-malware/clase-160-presentacion.pptx
+++ b/classes/parte-6-analisis-de-malware/160-reporte-de-analisis-de-malware/clase-160-presentacion.pptx
@@ -17,6 +17,9 @@
     <p:sldId id="265" r:id="rId16"/>
     <p:sldId id="266" r:id="rId17"/>
     <p:sldId id="267" r:id="rId18"/>
+    <p:sldId id="268" r:id="rId19"/>
+    <p:sldId id="269" r:id="rId20"/>
+    <p:sldId id="270" r:id="rId21"/>
   </p:sldIdLst>
   <p:sldSz cx="9144000" cy="6858000" type="screen4x3"/>
   <p:notesSz cx="6858000" cy="9144000"/>
@@ -3198,7 +3201,7 @@
                   <a:srgbClr val="0B3D2E"/>
                 </a:solidFill>
               </a:rPr>
-              <a:t>⚠️ Errores comunes</a:t>
+              <a:t>✍️ Ejercicios</a:t>
             </a:r>
           </a:p>
         </p:txBody>
@@ -3236,67 +3239,82 @@
                   <a:srgbClr val="22282E"/>
                 </a:solidFill>
               </a:rPr>
-              <a:t>•  Resumen ejecutivo lleno de jerga — Reescríbelo para dirección: riesgo y acción</a:t>
-            </a:r>
-          </a:p>
-          <a:p>
-            <a:pPr>
-              <a:spcAft>
-                <a:spcPts val="600"/>
-              </a:spcAft>
-            </a:pPr>
-            <a:r>
-              <a:rPr sz="1500">
-                <a:solidFill>
-                  <a:srgbClr val="22282E"/>
-                </a:solidFill>
-              </a:rPr>
-              <a:t>•  Hallazgos sin evidencia — Añade capturas/comandos que los respalden</a:t>
-            </a:r>
-          </a:p>
-          <a:p>
-            <a:pPr>
-              <a:spcAft>
-                <a:spcPts val="600"/>
-              </a:spcAft>
-            </a:pPr>
-            <a:r>
-              <a:rPr sz="1500">
-                <a:solidFill>
-                  <a:srgbClr val="22282E"/>
-                </a:solidFill>
-              </a:rPr>
-              <a:t>•  IOCs en prosa — Estructúralos en tabla/CSV para ingestión</a:t>
-            </a:r>
-          </a:p>
-          <a:p>
-            <a:pPr>
-              <a:spcAft>
-                <a:spcPts val="600"/>
-              </a:spcAft>
-            </a:pPr>
-            <a:r>
-              <a:rPr sz="1500">
-                <a:solidFill>
-                  <a:srgbClr val="22282E"/>
-                </a:solidFill>
-              </a:rPr>
-              <a:t>•  Recomendaciones vagas — Hazlas específicas, priorizadas y accionables</a:t>
-            </a:r>
-          </a:p>
-          <a:p>
-            <a:pPr>
-              <a:spcAft>
-                <a:spcPts val="600"/>
-              </a:spcAft>
-            </a:pPr>
-            <a:r>
-              <a:rPr sz="1500">
-                <a:solidFill>
-                  <a:srgbClr val="22282E"/>
-                </a:solidFill>
-              </a:rPr>
-              <a:t>•  Incluir el binario en el doc — Nunca; adjunta hashes e IOCs, no la muestra</a:t>
+              <a:t>•  Escribe un resumen ejecutivo de 8 líneas para dirección no técnica.</a:t>
+            </a:r>
+          </a:p>
+          <a:p>
+            <a:pPr>
+              <a:spcAft>
+                <a:spcPts val="600"/>
+              </a:spcAft>
+            </a:pPr>
+            <a:r>
+              <a:rPr sz="1500">
+                <a:solidFill>
+                  <a:srgbClr val="22282E"/>
+                </a:solidFill>
+              </a:rPr>
+              <a:t>•  Convierte 3 hallazgos en afirmaciones trazables con su evidencia.</a:t>
+            </a:r>
+          </a:p>
+          <a:p>
+            <a:pPr>
+              <a:spcAft>
+                <a:spcPts val="600"/>
+              </a:spcAft>
+            </a:pPr>
+            <a:r>
+              <a:rPr sz="1500">
+                <a:solidFill>
+                  <a:srgbClr val="22282E"/>
+                </a:solidFill>
+              </a:rPr>
+              <a:t>•  Construye una tabla de IOCs con tipo, valor y contexto.</a:t>
+            </a:r>
+          </a:p>
+          <a:p>
+            <a:pPr>
+              <a:spcAft>
+                <a:spcPts val="600"/>
+              </a:spcAft>
+            </a:pPr>
+            <a:r>
+              <a:rPr sz="1500">
+                <a:solidFill>
+                  <a:srgbClr val="22282E"/>
+                </a:solidFill>
+              </a:rPr>
+              <a:t>•  Justifica una severidad (crítica/alta/media) con criterios.</a:t>
+            </a:r>
+          </a:p>
+          <a:p>
+            <a:pPr>
+              <a:spcAft>
+                <a:spcPts val="600"/>
+              </a:spcAft>
+            </a:pPr>
+            <a:r>
+              <a:rPr sz="1500">
+                <a:solidFill>
+                  <a:srgbClr val="22282E"/>
+                </a:solidFill>
+              </a:rPr>
+              <a:t>•  Redacta 4 recomendaciones accionables priorizadas.</a:t>
+            </a:r>
+          </a:p>
+          <a:p>
+            <a:pPr>
+              <a:spcAft>
+                <a:spcPts val="600"/>
+              </a:spcAft>
+            </a:pPr>
+            <a:r>
+              <a:rPr sz="1500">
+                <a:solidFill>
+                  <a:srgbClr val="22282E"/>
+                </a:solidFill>
+              </a:rPr>
+              <a:t>•  Adjunta una capa de ATT&amp;CK Navigator y una regla YARA.</a:t>
             </a:r>
           </a:p>
         </p:txBody>
@@ -3347,7 +3365,7 @@
                   <a:srgbClr val="0B3D2E"/>
                 </a:solidFill>
               </a:rPr>
-              <a:t>❓ Preguntas frecuentes</a:t>
+              <a:t>📝 Reto verificable</a:t>
             </a:r>
           </a:p>
         </p:txBody>
@@ -3385,37 +3403,22 @@
                   <a:srgbClr val="22282E"/>
                 </a:solidFill>
               </a:rPr>
-              <a:t>•  ❓ ¿Un informe para todos? No. Estructúralo por capas: resumen para dirección, detalle para analistas, entregables para el SOC.</a:t>
-            </a:r>
-          </a:p>
-          <a:p>
-            <a:pPr>
-              <a:spcAft>
-                <a:spcPts val="600"/>
-              </a:spcAft>
-            </a:pPr>
-            <a:r>
-              <a:rPr sz="1500">
-                <a:solidFill>
-                  <a:srgbClr val="22282E"/>
-                </a:solidFill>
-              </a:rPr>
-              <a:t>•  ❓ ¿Cuánta especulación es aceptable? La justa y marcada como tal. Separa hechos (con evidencia) de hipótesis (con nivel de confianza).</a:t>
-            </a:r>
-          </a:p>
-          <a:p>
-            <a:pPr>
-              <a:spcAft>
-                <a:spcPts val="600"/>
-              </a:spcAft>
-            </a:pPr>
-            <a:r>
-              <a:rPr sz="1500">
-                <a:solidFill>
-                  <a:srgbClr val="22282E"/>
-                </a:solidFill>
-              </a:rPr>
-              <a:t>•  ❓ ¿Qué entregables son imprescindibles? IOCs consumibles, TTPs mapeados a ATT&amp;CK y al menos una detección (YARA/regla EDR) reutilizable.</a:t>
+              <a:t>•  Entrega un informe completo de una muestra con las 11 secciones, IOCs estructurados, capa ATT&amp;CK, regla YARA y resumen ejecutivo, listo para su consumo por un SOC.</a:t>
+            </a:r>
+          </a:p>
+          <a:p>
+            <a:pPr>
+              <a:spcAft>
+                <a:spcPts val="600"/>
+              </a:spcAft>
+            </a:pPr>
+            <a:r>
+              <a:rPr sz="1500">
+                <a:solidFill>
+                  <a:srgbClr val="22282E"/>
+                </a:solidFill>
+              </a:rPr>
+              <a:t>•  Criterio de aceptación: un lector no técnico entiende el riesgo y la recomendación solo con el resumen ejecutivo, y un analista puede reproducir los hallazgos y desplegar los IOCs y la regla YARA…</a:t>
             </a:r>
           </a:p>
         </p:txBody>
@@ -3466,7 +3469,7 @@
                   <a:srgbClr val="0B3D2E"/>
                 </a:solidFill>
               </a:rPr>
-              <a:t>🔗 Referencias</a:t>
+              <a:t>⚠️ Errores comunes</a:t>
             </a:r>
           </a:p>
         </p:txBody>
@@ -3504,6 +3507,274 @@
                   <a:srgbClr val="22282E"/>
                 </a:solidFill>
               </a:rPr>
+              <a:t>•  Resumen ejecutivo lleno de jerga — Reescríbelo para dirección: riesgo y acción</a:t>
+            </a:r>
+          </a:p>
+          <a:p>
+            <a:pPr>
+              <a:spcAft>
+                <a:spcPts val="600"/>
+              </a:spcAft>
+            </a:pPr>
+            <a:r>
+              <a:rPr sz="1500">
+                <a:solidFill>
+                  <a:srgbClr val="22282E"/>
+                </a:solidFill>
+              </a:rPr>
+              <a:t>•  Hallazgos sin evidencia — Añade capturas/comandos que los respalden</a:t>
+            </a:r>
+          </a:p>
+          <a:p>
+            <a:pPr>
+              <a:spcAft>
+                <a:spcPts val="600"/>
+              </a:spcAft>
+            </a:pPr>
+            <a:r>
+              <a:rPr sz="1500">
+                <a:solidFill>
+                  <a:srgbClr val="22282E"/>
+                </a:solidFill>
+              </a:rPr>
+              <a:t>•  IOCs en prosa — Estructúralos en tabla/CSV para ingestión</a:t>
+            </a:r>
+          </a:p>
+          <a:p>
+            <a:pPr>
+              <a:spcAft>
+                <a:spcPts val="600"/>
+              </a:spcAft>
+            </a:pPr>
+            <a:r>
+              <a:rPr sz="1500">
+                <a:solidFill>
+                  <a:srgbClr val="22282E"/>
+                </a:solidFill>
+              </a:rPr>
+              <a:t>•  Recomendaciones vagas — Hazlas específicas, priorizadas y accionables</a:t>
+            </a:r>
+          </a:p>
+          <a:p>
+            <a:pPr>
+              <a:spcAft>
+                <a:spcPts val="600"/>
+              </a:spcAft>
+            </a:pPr>
+            <a:r>
+              <a:rPr sz="1500">
+                <a:solidFill>
+                  <a:srgbClr val="22282E"/>
+                </a:solidFill>
+              </a:rPr>
+              <a:t>•  Incluir el binario en el doc — Nunca; adjunta hashes e IOCs, no la muestra</a:t>
+            </a:r>
+          </a:p>
+        </p:txBody>
+      </p:sp>
+    </p:spTree>
+  </p:cSld>
+  <p:clrMapOvr>
+    <a:masterClrMapping/>
+  </p:clrMapOvr>
+</p:sld>
+</file>
+
+<file path=ppt/slides/slide13.xml><?xml version="1.0" encoding="utf-8"?>
+<p:sld xmlns:a="http://schemas.openxmlformats.org/drawingml/2006/main" xmlns:p="http://schemas.openxmlformats.org/presentationml/2006/main" xmlns:r="http://schemas.openxmlformats.org/officeDocument/2006/relationships">
+  <p:cSld>
+    <p:spTree>
+      <p:nvGrpSpPr>
+        <p:cNvPr id="1" name=""/>
+        <p:cNvGrpSpPr/>
+        <p:nvPr/>
+      </p:nvGrpSpPr>
+      <p:grpSpPr/>
+      <p:sp>
+        <p:nvSpPr>
+          <p:cNvPr id="2" name="TextBox 1"/>
+          <p:cNvSpPr txBox="1"/>
+          <p:nvPr/>
+        </p:nvSpPr>
+        <p:spPr>
+          <a:xfrm>
+            <a:off x="457200" y="320040"/>
+            <a:ext cx="8229600" cy="822960"/>
+          </a:xfrm>
+          <a:prstGeom prst="rect">
+            <a:avLst/>
+          </a:prstGeom>
+          <a:noFill/>
+        </p:spPr>
+        <p:txBody>
+          <a:bodyPr wrap="square">
+            <a:spAutoFit/>
+          </a:bodyPr>
+          <a:lstStyle/>
+          <a:p>
+            <a:r>
+              <a:rPr sz="2600" b="1">
+                <a:solidFill>
+                  <a:srgbClr val="0B3D2E"/>
+                </a:solidFill>
+              </a:rPr>
+              <a:t>❓ Preguntas frecuentes</a:t>
+            </a:r>
+          </a:p>
+        </p:txBody>
+      </p:sp>
+      <p:sp>
+        <p:nvSpPr>
+          <p:cNvPr id="3" name="TextBox 2"/>
+          <p:cNvSpPr txBox="1"/>
+          <p:nvPr/>
+        </p:nvSpPr>
+        <p:spPr>
+          <a:xfrm>
+            <a:off x="457200" y="1280160"/>
+            <a:ext cx="8229600" cy="4937760"/>
+          </a:xfrm>
+          <a:prstGeom prst="rect">
+            <a:avLst/>
+          </a:prstGeom>
+          <a:noFill/>
+        </p:spPr>
+        <p:txBody>
+          <a:bodyPr wrap="square">
+            <a:spAutoFit/>
+          </a:bodyPr>
+          <a:lstStyle/>
+          <a:p>
+            <a:pPr>
+              <a:spcAft>
+                <a:spcPts val="600"/>
+              </a:spcAft>
+            </a:pPr>
+            <a:r>
+              <a:rPr sz="1500">
+                <a:solidFill>
+                  <a:srgbClr val="22282E"/>
+                </a:solidFill>
+              </a:rPr>
+              <a:t>•  ❓ ¿Un informe para todos? No. Estructúralo por capas: resumen para dirección, detalle para analistas, entregables para el SOC.</a:t>
+            </a:r>
+          </a:p>
+          <a:p>
+            <a:pPr>
+              <a:spcAft>
+                <a:spcPts val="600"/>
+              </a:spcAft>
+            </a:pPr>
+            <a:r>
+              <a:rPr sz="1500">
+                <a:solidFill>
+                  <a:srgbClr val="22282E"/>
+                </a:solidFill>
+              </a:rPr>
+              <a:t>•  ❓ ¿Cuánta especulación es aceptable? La justa y marcada como tal. Separa hechos (con evidencia) de hipótesis (con nivel de confianza).</a:t>
+            </a:r>
+          </a:p>
+          <a:p>
+            <a:pPr>
+              <a:spcAft>
+                <a:spcPts val="600"/>
+              </a:spcAft>
+            </a:pPr>
+            <a:r>
+              <a:rPr sz="1500">
+                <a:solidFill>
+                  <a:srgbClr val="22282E"/>
+                </a:solidFill>
+              </a:rPr>
+              <a:t>•  ❓ ¿Qué entregables son imprescindibles? IOCs consumibles, TTPs mapeados a ATT&amp;CK y al menos una detección (YARA/regla EDR) reutilizable.</a:t>
+            </a:r>
+          </a:p>
+        </p:txBody>
+      </p:sp>
+    </p:spTree>
+  </p:cSld>
+  <p:clrMapOvr>
+    <a:masterClrMapping/>
+  </p:clrMapOvr>
+</p:sld>
+</file>
+
+<file path=ppt/slides/slide14.xml><?xml version="1.0" encoding="utf-8"?>
+<p:sld xmlns:a="http://schemas.openxmlformats.org/drawingml/2006/main" xmlns:p="http://schemas.openxmlformats.org/presentationml/2006/main" xmlns:r="http://schemas.openxmlformats.org/officeDocument/2006/relationships">
+  <p:cSld>
+    <p:spTree>
+      <p:nvGrpSpPr>
+        <p:cNvPr id="1" name=""/>
+        <p:cNvGrpSpPr/>
+        <p:nvPr/>
+      </p:nvGrpSpPr>
+      <p:grpSpPr/>
+      <p:sp>
+        <p:nvSpPr>
+          <p:cNvPr id="2" name="TextBox 1"/>
+          <p:cNvSpPr txBox="1"/>
+          <p:nvPr/>
+        </p:nvSpPr>
+        <p:spPr>
+          <a:xfrm>
+            <a:off x="457200" y="320040"/>
+            <a:ext cx="8229600" cy="822960"/>
+          </a:xfrm>
+          <a:prstGeom prst="rect">
+            <a:avLst/>
+          </a:prstGeom>
+          <a:noFill/>
+        </p:spPr>
+        <p:txBody>
+          <a:bodyPr wrap="square">
+            <a:spAutoFit/>
+          </a:bodyPr>
+          <a:lstStyle/>
+          <a:p>
+            <a:r>
+              <a:rPr sz="2600" b="1">
+                <a:solidFill>
+                  <a:srgbClr val="0B3D2E"/>
+                </a:solidFill>
+              </a:rPr>
+              <a:t>🔗 Referencias</a:t>
+            </a:r>
+          </a:p>
+        </p:txBody>
+      </p:sp>
+      <p:sp>
+        <p:nvSpPr>
+          <p:cNvPr id="3" name="TextBox 2"/>
+          <p:cNvSpPr txBox="1"/>
+          <p:nvPr/>
+        </p:nvSpPr>
+        <p:spPr>
+          <a:xfrm>
+            <a:off x="457200" y="1280160"/>
+            <a:ext cx="8229600" cy="4937760"/>
+          </a:xfrm>
+          <a:prstGeom prst="rect">
+            <a:avLst/>
+          </a:prstGeom>
+          <a:noFill/>
+        </p:spPr>
+        <p:txBody>
+          <a:bodyPr wrap="square">
+            <a:spAutoFit/>
+          </a:bodyPr>
+          <a:lstStyle/>
+          <a:p>
+            <a:pPr>
+              <a:spcAft>
+                <a:spcPts val="600"/>
+              </a:spcAft>
+            </a:pPr>
+            <a:r>
+              <a:rPr sz="1500">
+                <a:solidFill>
+                  <a:srgbClr val="22282E"/>
+                </a:solidFill>
+              </a:rPr>
               <a:t>•  Sikorski &amp; Honig, Practical Malware Analysis.</a:t>
             </a:r>
           </a:p>
@@ -3554,6 +3825,81 @@
           </a:p>
         </p:txBody>
       </p:sp>
+    </p:spTree>
+  </p:cSld>
+  <p:clrMapOvr>
+    <a:masterClrMapping/>
+  </p:clrMapOvr>
+</p:sld>
+</file>
+
+<file path=ppt/slides/slide15.xml><?xml version="1.0" encoding="utf-8"?>
+<p:sld xmlns:a="http://schemas.openxmlformats.org/drawingml/2006/main" xmlns:p="http://schemas.openxmlformats.org/presentationml/2006/main" xmlns:r="http://schemas.openxmlformats.org/officeDocument/2006/relationships">
+  <p:cSld>
+    <p:spTree>
+      <p:nvGrpSpPr>
+        <p:cNvPr id="1" name=""/>
+        <p:cNvGrpSpPr/>
+        <p:nvPr/>
+      </p:nvGrpSpPr>
+      <p:grpSpPr/>
+      <p:sp>
+        <p:nvSpPr>
+          <p:cNvPr id="2" name="TextBox 1"/>
+          <p:cNvSpPr txBox="1"/>
+          <p:nvPr/>
+        </p:nvSpPr>
+        <p:spPr>
+          <a:xfrm>
+            <a:off x="457200" y="274320"/>
+            <a:ext cx="8229600" cy="640080"/>
+          </a:xfrm>
+          <a:prstGeom prst="rect">
+            <a:avLst/>
+          </a:prstGeom>
+          <a:noFill/>
+        </p:spPr>
+        <p:txBody>
+          <a:bodyPr wrap="square">
+            <a:spAutoFit/>
+          </a:bodyPr>
+          <a:lstStyle/>
+          <a:p>
+            <a:r>
+              <a:rPr sz="2200" b="1">
+                <a:solidFill>
+                  <a:srgbClr val="0B3D2E"/>
+                </a:solidFill>
+              </a:rPr>
+              <a:t>Diagrama de la clase</a:t>
+            </a:r>
+          </a:p>
+        </p:txBody>
+      </p:sp>
+      <p:pic>
+        <p:nvPicPr>
+          <p:cNvPr id="3" name="Picture 2" descr="8aa5666a48664123.png"/>
+          <p:cNvPicPr>
+            <a:picLocks noChangeAspect="1"/>
+          </p:cNvPicPr>
+          <p:nvPr/>
+        </p:nvPicPr>
+        <p:blipFill>
+          <a:blip r:embed="rId2"/>
+          <a:stretch>
+            <a:fillRect/>
+          </a:stretch>
+        </p:blipFill>
+        <p:spPr>
+          <a:xfrm>
+            <a:off x="457200" y="2555748"/>
+            <a:ext cx="8229600" cy="2386584"/>
+          </a:xfrm>
+          <a:prstGeom prst="rect">
+            <a:avLst/>
+          </a:prstGeom>
+        </p:spPr>
+      </p:pic>
     </p:spTree>
   </p:cSld>
   <p:clrMapOvr>
@@ -3638,7 +3984,7 @@
                   <a:srgbClr val="22282E"/>
                 </a:solidFill>
               </a:rPr>
-              <a:t>•  Cerrar el ciclo: convertir todo el análisis en un informe profesional que distintos públicos puedan usar para decidir y actuar. El alumno aprenderá a estructurar un reporte con resumen ejecutivo, hallazgos técnicos, IOCs, TTPs, evaluación de impacto y recomendaciones, y a entregar los artefactos (YARA, IOCs, config) en formatos consumibles.</a:t>
+              <a:t>•  Cerrar el ciclo: convertir todo el análisis en un informe profesional que distintos públicos puedan usar para decidir y actuar. El alumno aprenderá a estructurar un reporte con resumen ejecutivo…</a:t>
             </a:r>
           </a:p>
         </p:txBody>
@@ -4032,7 +4378,7 @@
                   <a:srgbClr val="0B3D2E"/>
                 </a:solidFill>
               </a:rPr>
-              <a:t>📖 Definiciones y características</a:t>
+              <a:t>🧠 Explicación en profundidad</a:t>
             </a:r>
           </a:p>
         </p:txBody>
@@ -4070,67 +4416,97 @@
                   <a:srgbClr val="22282E"/>
                 </a:solidFill>
               </a:rPr>
-              <a:t>•  Resumen ejecutivo: síntesis para dirección. Característica clave: conclusión y riesgo sin tecnicismos.</a:t>
-            </a:r>
-          </a:p>
-          <a:p>
-            <a:pPr>
-              <a:spcAft>
-                <a:spcPts val="600"/>
-              </a:spcAft>
-            </a:pPr>
-            <a:r>
-              <a:rPr sz="1500">
-                <a:solidFill>
-                  <a:srgbClr val="22282E"/>
-                </a:solidFill>
-              </a:rPr>
-              <a:t>•  Hallazgo trazable: afirmación respaldada por evidencia reproducible. Característica clave: verificable.</a:t>
-            </a:r>
-          </a:p>
-          <a:p>
-            <a:pPr>
-              <a:spcAft>
-                <a:spcPts val="600"/>
-              </a:spcAft>
-            </a:pPr>
-            <a:r>
-              <a:rPr sz="1500">
-                <a:solidFill>
-                  <a:srgbClr val="22282E"/>
-                </a:solidFill>
-              </a:rPr>
-              <a:t>•  IOC estructurado: indicador con tipo, valor y contexto. Característica clave: listo para ingestión.</a:t>
-            </a:r>
-          </a:p>
-          <a:p>
-            <a:pPr>
-              <a:spcAft>
-                <a:spcPts val="600"/>
-              </a:spcAft>
-            </a:pPr>
-            <a:r>
-              <a:rPr sz="1500">
-                <a:solidFill>
-                  <a:srgbClr val="22282E"/>
-                </a:solidFill>
-              </a:rPr>
-              <a:t>•  Severidad: medida de impacto y urgencia. Característica clave: prioriza la respuesta.</a:t>
-            </a:r>
-          </a:p>
-          <a:p>
-            <a:pPr>
-              <a:spcAft>
-                <a:spcPts val="600"/>
-              </a:spcAft>
-            </a:pPr>
-            <a:r>
-              <a:rPr sz="1500">
-                <a:solidFill>
-                  <a:srgbClr val="22282E"/>
-                </a:solidFill>
-              </a:rPr>
-              <a:t>•  Entregable: artefacto reutilizable (YARA, CSV de IOCs, capa ATT&amp;CK). Característica clave: acción inmediata.</a:t>
+              <a:t>•  Como el pentest (clase 085), el análisis de malware culmina en un informe: todo el trabajo técnico</a:t>
+            </a:r>
+          </a:p>
+          <a:p>
+            <a:pPr>
+              <a:spcAft>
+                <a:spcPts val="600"/>
+              </a:spcAft>
+            </a:pPr>
+            <a:r>
+              <a:rPr sz="1500">
+                <a:solidFill>
+                  <a:srgbClr val="22282E"/>
+                </a:solidFill>
+              </a:rPr>
+              <a:t>•  —desempaquetar, revertir, extraer la config— solo genera valor cuando se convierte en un documento que</a:t>
+            </a:r>
+          </a:p>
+          <a:p>
+            <a:pPr>
+              <a:spcAft>
+                <a:spcPts val="600"/>
+              </a:spcAft>
+            </a:pPr>
+            <a:r>
+              <a:rPr sz="1500">
+                <a:solidFill>
+                  <a:srgbClr val="22282E"/>
+                </a:solidFill>
+              </a:rPr>
+              <a:t>•  otros pueden usar para defender, responder y decidir. Un análisis brillante que se queda en la cabeza</a:t>
+            </a:r>
+          </a:p>
+          <a:p>
+            <a:pPr>
+              <a:spcAft>
+                <a:spcPts val="600"/>
+              </a:spcAft>
+            </a:pPr>
+            <a:r>
+              <a:rPr sz="1500">
+                <a:solidFill>
+                  <a:srgbClr val="22282E"/>
+                </a:solidFill>
+              </a:rPr>
+              <a:t>•  del analista no protege a nadie. El reporte transforma el conocimiento individual en capacidad</a:t>
+            </a:r>
+          </a:p>
+          <a:p>
+            <a:pPr>
+              <a:spcAft>
+                <a:spcPts val="600"/>
+              </a:spcAft>
+            </a:pPr>
+            <a:r>
+              <a:rPr sz="1500">
+                <a:solidFill>
+                  <a:srgbClr val="22282E"/>
+                </a:solidFill>
+              </a:rPr>
+              <a:t>•  organizativa, y saber estructurarlo es tan parte del oficio como el análisis mismo.</a:t>
+            </a:r>
+          </a:p>
+          <a:p>
+            <a:pPr>
+              <a:spcAft>
+                <a:spcPts val="600"/>
+              </a:spcAft>
+            </a:pPr>
+            <a:r>
+              <a:rPr sz="1500">
+                <a:solidFill>
+                  <a:srgbClr val="22282E"/>
+                </a:solidFill>
+              </a:rPr>
+              <a:t>•  La clave que organiza todo el reporte es que tiene audiencias distintas con necesidades distintas, y</a:t>
+            </a:r>
+          </a:p>
+          <a:p>
+            <a:pPr>
+              <a:spcAft>
+                <a:spcPts val="600"/>
+              </a:spcAft>
+            </a:pPr>
+            <a:r>
+              <a:rPr sz="1500">
+                <a:solidFill>
+                  <a:srgbClr val="22282E"/>
+                </a:solidFill>
+              </a:rPr>
+              <a:t>•  cada una necesita una parte diferente. La dirección necesita saber el impacto de negocio y el</a:t>
             </a:r>
           </a:p>
         </p:txBody>
@@ -4181,7 +4557,7 @@
                   <a:srgbClr val="0B3D2E"/>
                 </a:solidFill>
               </a:rPr>
-              <a:t>🧰 Herramientas y preparación</a:t>
+              <a:t>📖 Definiciones y características</a:t>
             </a:r>
           </a:p>
         </p:txBody>
@@ -4219,52 +4595,67 @@
                   <a:srgbClr val="22282E"/>
                 </a:solidFill>
               </a:rPr>
-              <a:t>•  Plantilla de informe (Markdown/Word) y ATT&amp;CK Navigator para la capa.</a:t>
-            </a:r>
-          </a:p>
-          <a:p>
-            <a:pPr>
-              <a:spcAft>
-                <a:spcPts val="600"/>
-              </a:spcAft>
-            </a:pPr>
-            <a:r>
-              <a:rPr sz="1500">
-                <a:solidFill>
-                  <a:srgbClr val="22282E"/>
-                </a:solidFill>
-              </a:rPr>
-              <a:t>•  MISP/STIX o CSV para IOCs; repositorio de reglas YARA.</a:t>
-            </a:r>
-          </a:p>
-          <a:p>
-            <a:pPr>
-              <a:spcAft>
-                <a:spcPts val="600"/>
-              </a:spcAft>
-            </a:pPr>
-            <a:r>
-              <a:rPr sz="1500">
-                <a:solidFill>
-                  <a:srgbClr val="22282E"/>
-                </a:solidFill>
-              </a:rPr>
-              <a:t>•  Capturas de las herramientas usadas (ProcMon, Volatility, Wireshark, Ghidra) como evidencia.</a:t>
-            </a:r>
-          </a:p>
-          <a:p>
-            <a:pPr>
-              <a:spcAft>
-                <a:spcPts val="600"/>
-              </a:spcAft>
-            </a:pPr>
-            <a:r>
-              <a:rPr sz="1500">
-                <a:solidFill>
-                  <a:srgbClr val="22282E"/>
-                </a:solidFill>
-              </a:rPr>
-              <a:t>•  Guía de estilo: claro, conciso, sin especular más allá de la evidencia.</a:t>
+              <a:t>•  Resumen ejecutivo: síntesis para dirección. Característica clave: conclusión y riesgo sin tecnicismos.</a:t>
+            </a:r>
+          </a:p>
+          <a:p>
+            <a:pPr>
+              <a:spcAft>
+                <a:spcPts val="600"/>
+              </a:spcAft>
+            </a:pPr>
+            <a:r>
+              <a:rPr sz="1500">
+                <a:solidFill>
+                  <a:srgbClr val="22282E"/>
+                </a:solidFill>
+              </a:rPr>
+              <a:t>•  Hallazgo trazable: afirmación respaldada por evidencia reproducible. Característica clave: verificable.</a:t>
+            </a:r>
+          </a:p>
+          <a:p>
+            <a:pPr>
+              <a:spcAft>
+                <a:spcPts val="600"/>
+              </a:spcAft>
+            </a:pPr>
+            <a:r>
+              <a:rPr sz="1500">
+                <a:solidFill>
+                  <a:srgbClr val="22282E"/>
+                </a:solidFill>
+              </a:rPr>
+              <a:t>•  IOC estructurado: indicador con tipo, valor y contexto. Característica clave: listo para ingestión.</a:t>
+            </a:r>
+          </a:p>
+          <a:p>
+            <a:pPr>
+              <a:spcAft>
+                <a:spcPts val="600"/>
+              </a:spcAft>
+            </a:pPr>
+            <a:r>
+              <a:rPr sz="1500">
+                <a:solidFill>
+                  <a:srgbClr val="22282E"/>
+                </a:solidFill>
+              </a:rPr>
+              <a:t>•  Severidad: medida de impacto y urgencia. Característica clave: prioriza la respuesta.</a:t>
+            </a:r>
+          </a:p>
+          <a:p>
+            <a:pPr>
+              <a:spcAft>
+                <a:spcPts val="600"/>
+              </a:spcAft>
+            </a:pPr>
+            <a:r>
+              <a:rPr sz="1500">
+                <a:solidFill>
+                  <a:srgbClr val="22282E"/>
+                </a:solidFill>
+              </a:rPr>
+              <a:t>•  Entregable: artefacto reutilizable (YARA, CSV de IOCs, capa ATT&amp;CK). Característica clave: acción inmediata.</a:t>
             </a:r>
           </a:p>
         </p:txBody>
@@ -4315,7 +4706,7 @@
                   <a:srgbClr val="0B3D2E"/>
                 </a:solidFill>
               </a:rPr>
-              <a:t>🧪 Laboratorio guiado</a:t>
+              <a:t>📔 Glosario</a:t>
             </a:r>
           </a:p>
         </p:txBody>
@@ -4353,97 +4744,97 @@
                   <a:srgbClr val="22282E"/>
                 </a:solidFill>
               </a:rPr>
-              <a:t>•  Redacta el informe completo de una muestra analizada en la parte:</a:t>
-            </a:r>
-          </a:p>
-          <a:p>
-            <a:pPr>
-              <a:spcAft>
-                <a:spcPts val="600"/>
-              </a:spcAft>
-            </a:pPr>
-            <a:r>
-              <a:rPr sz="1500">
-                <a:solidFill>
-                  <a:srgbClr val="22282E"/>
-                </a:solidFill>
-              </a:rPr>
-              <a:t>•  Portada y metadatos: nombre de la muestra, hashes (SHA-256, imphash), analista, fecha, TLP.</a:t>
-            </a:r>
-          </a:p>
-          <a:p>
-            <a:pPr>
-              <a:spcAft>
-                <a:spcPts val="600"/>
-              </a:spcAft>
-            </a:pPr>
-            <a:r>
-              <a:rPr sz="1500">
-                <a:solidFill>
-                  <a:srgbClr val="22282E"/>
-                </a:solidFill>
-              </a:rPr>
-              <a:t>•  Resumen ejecutivo (½ página): qué es, qué hace, impacto y recomendación principal, en lenguaje llano.</a:t>
-            </a:r>
-          </a:p>
-          <a:p>
-            <a:pPr>
-              <a:spcAft>
-                <a:spcPts val="600"/>
-              </a:spcAft>
-            </a:pPr>
-            <a:r>
-              <a:rPr sz="1500">
-                <a:solidFill>
-                  <a:srgbClr val="22282E"/>
-                </a:solidFill>
-              </a:rPr>
-              <a:t>•  Detalles de la muestra: tipo, familia, tamaño, packing, entorno de análisis (VM aislada).</a:t>
-            </a:r>
-          </a:p>
-          <a:p>
-            <a:pPr>
-              <a:spcAft>
-                <a:spcPts val="600"/>
-              </a:spcAft>
-            </a:pPr>
-            <a:r>
-              <a:rPr sz="1500">
-                <a:solidFill>
-                  <a:srgbClr val="22282E"/>
-                </a:solidFill>
-              </a:rPr>
-              <a:t>•  Análisis estático: strings clave, imports/capacidades, entropía, hallazgos del desensamblado.</a:t>
-            </a:r>
-          </a:p>
-          <a:p>
-            <a:pPr>
-              <a:spcAft>
-                <a:spcPts val="600"/>
-              </a:spcAft>
-            </a:pPr>
-            <a:r>
-              <a:rPr sz="1500">
-                <a:solidFill>
-                  <a:srgbClr val="22282E"/>
-                </a:solidFill>
-              </a:rPr>
-              <a:t>•  Análisis dinámico: árbol de procesos, persistencia, archivos/registro, mutex.</a:t>
-            </a:r>
-          </a:p>
-          <a:p>
-            <a:pPr>
-              <a:spcAft>
-                <a:spcPts val="600"/>
-              </a:spcAft>
-            </a:pPr>
-            <a:r>
-              <a:rPr sz="1500">
-                <a:solidFill>
-                  <a:srgbClr val="22282E"/>
-                </a:solidFill>
-              </a:rPr>
-              <a:t>•  Red y C2: protocolo, dominios/IPs, patrón de beacon, config extraída.</a:t>
+              <a:t>•  Término — Definición concisa</a:t>
+            </a:r>
+          </a:p>
+          <a:p>
+            <a:pPr>
+              <a:spcAft>
+                <a:spcPts val="600"/>
+              </a:spcAft>
+            </a:pPr>
+            <a:r>
+              <a:rPr sz="1500">
+                <a:solidFill>
+                  <a:srgbClr val="22282E"/>
+                </a:solidFill>
+              </a:rPr>
+              <a:t>•  Reporte de análisis — Documento que comunica los resultados del análisis</a:t>
+            </a:r>
+          </a:p>
+          <a:p>
+            <a:pPr>
+              <a:spcAft>
+                <a:spcPts val="600"/>
+              </a:spcAft>
+            </a:pPr>
+            <a:r>
+              <a:rPr sz="1500">
+                <a:solidFill>
+                  <a:srgbClr val="22282E"/>
+                </a:solidFill>
+              </a:rPr>
+              <a:t>•  Audiencia — Lector con necesidades específicas</a:t>
+            </a:r>
+          </a:p>
+          <a:p>
+            <a:pPr>
+              <a:spcAft>
+                <a:spcPts val="600"/>
+              </a:spcAft>
+            </a:pPr>
+            <a:r>
+              <a:rPr sz="1500">
+                <a:solidFill>
+                  <a:srgbClr val="22282E"/>
+                </a:solidFill>
+              </a:rPr>
+              <a:t>•  Dirección — Necesita impacto de negocio y riesgo</a:t>
+            </a:r>
+          </a:p>
+          <a:p>
+            <a:pPr>
+              <a:spcAft>
+                <a:spcPts val="600"/>
+              </a:spcAft>
+            </a:pPr>
+            <a:r>
+              <a:rPr sz="1500">
+                <a:solidFill>
+                  <a:srgbClr val="22282E"/>
+                </a:solidFill>
+              </a:rPr>
+              <a:t>•  Respuesta a incidentes — Necesita IOCs accionables para contener</a:t>
+            </a:r>
+          </a:p>
+          <a:p>
+            <a:pPr>
+              <a:spcAft>
+                <a:spcPts val="600"/>
+              </a:spcAft>
+            </a:pPr>
+            <a:r>
+              <a:rPr sz="1500">
+                <a:solidFill>
+                  <a:srgbClr val="22282E"/>
+                </a:solidFill>
+              </a:rPr>
+              <a:t>•  Ingeniería de detección — Necesita TTPs para construir detecciones</a:t>
+            </a:r>
+          </a:p>
+          <a:p>
+            <a:pPr>
+              <a:spcAft>
+                <a:spcPts val="600"/>
+              </a:spcAft>
+            </a:pPr>
+            <a:r>
+              <a:rPr sz="1500">
+                <a:solidFill>
+                  <a:srgbClr val="22282E"/>
+                </a:solidFill>
+              </a:rPr>
+              <a:t>•  Resumen ejecutivo — Qué es, qué hace, impacto y recomendación, sin jerga</a:t>
             </a:r>
           </a:p>
         </p:txBody>
@@ -4494,7 +4885,7 @@
                   <a:srgbClr val="0B3D2E"/>
                 </a:solidFill>
               </a:rPr>
-              <a:t>✍️ Ejercicios</a:t>
+              <a:t>🧰 Herramientas y preparación</a:t>
             </a:r>
           </a:p>
         </p:txBody>
@@ -4532,82 +4923,52 @@
                   <a:srgbClr val="22282E"/>
                 </a:solidFill>
               </a:rPr>
-              <a:t>•  Escribe un resumen ejecutivo de 8 líneas para dirección no técnica.</a:t>
-            </a:r>
-          </a:p>
-          <a:p>
-            <a:pPr>
-              <a:spcAft>
-                <a:spcPts val="600"/>
-              </a:spcAft>
-            </a:pPr>
-            <a:r>
-              <a:rPr sz="1500">
-                <a:solidFill>
-                  <a:srgbClr val="22282E"/>
-                </a:solidFill>
-              </a:rPr>
-              <a:t>•  Convierte 3 hallazgos en afirmaciones trazables con su evidencia.</a:t>
-            </a:r>
-          </a:p>
-          <a:p>
-            <a:pPr>
-              <a:spcAft>
-                <a:spcPts val="600"/>
-              </a:spcAft>
-            </a:pPr>
-            <a:r>
-              <a:rPr sz="1500">
-                <a:solidFill>
-                  <a:srgbClr val="22282E"/>
-                </a:solidFill>
-              </a:rPr>
-              <a:t>•  Construye una tabla de IOCs con tipo, valor y contexto.</a:t>
-            </a:r>
-          </a:p>
-          <a:p>
-            <a:pPr>
-              <a:spcAft>
-                <a:spcPts val="600"/>
-              </a:spcAft>
-            </a:pPr>
-            <a:r>
-              <a:rPr sz="1500">
-                <a:solidFill>
-                  <a:srgbClr val="22282E"/>
-                </a:solidFill>
-              </a:rPr>
-              <a:t>•  Justifica una severidad (crítica/alta/media) con criterios.</a:t>
-            </a:r>
-          </a:p>
-          <a:p>
-            <a:pPr>
-              <a:spcAft>
-                <a:spcPts val="600"/>
-              </a:spcAft>
-            </a:pPr>
-            <a:r>
-              <a:rPr sz="1500">
-                <a:solidFill>
-                  <a:srgbClr val="22282E"/>
-                </a:solidFill>
-              </a:rPr>
-              <a:t>•  Redacta 4 recomendaciones accionables priorizadas.</a:t>
-            </a:r>
-          </a:p>
-          <a:p>
-            <a:pPr>
-              <a:spcAft>
-                <a:spcPts val="600"/>
-              </a:spcAft>
-            </a:pPr>
-            <a:r>
-              <a:rPr sz="1500">
-                <a:solidFill>
-                  <a:srgbClr val="22282E"/>
-                </a:solidFill>
-              </a:rPr>
-              <a:t>•  Adjunta una capa de ATT&amp;CK Navigator y una regla YARA.</a:t>
+              <a:t>•  Plantilla de informe (Markdown/Word) y ATT&amp;CK Navigator para la capa.</a:t>
+            </a:r>
+          </a:p>
+          <a:p>
+            <a:pPr>
+              <a:spcAft>
+                <a:spcPts val="600"/>
+              </a:spcAft>
+            </a:pPr>
+            <a:r>
+              <a:rPr sz="1500">
+                <a:solidFill>
+                  <a:srgbClr val="22282E"/>
+                </a:solidFill>
+              </a:rPr>
+              <a:t>•  MISP/STIX o CSV para IOCs; repositorio de reglas YARA.</a:t>
+            </a:r>
+          </a:p>
+          <a:p>
+            <a:pPr>
+              <a:spcAft>
+                <a:spcPts val="600"/>
+              </a:spcAft>
+            </a:pPr>
+            <a:r>
+              <a:rPr sz="1500">
+                <a:solidFill>
+                  <a:srgbClr val="22282E"/>
+                </a:solidFill>
+              </a:rPr>
+              <a:t>•  Capturas de las herramientas usadas (ProcMon, Volatility, Wireshark, Ghidra) como evidencia.</a:t>
+            </a:r>
+          </a:p>
+          <a:p>
+            <a:pPr>
+              <a:spcAft>
+                <a:spcPts val="600"/>
+              </a:spcAft>
+            </a:pPr>
+            <a:r>
+              <a:rPr sz="1500">
+                <a:solidFill>
+                  <a:srgbClr val="22282E"/>
+                </a:solidFill>
+              </a:rPr>
+              <a:t>•  Guía de estilo: claro, conciso, sin especular más allá de la evidencia.</a:t>
             </a:r>
           </a:p>
         </p:txBody>
@@ -4658,7 +5019,7 @@
                   <a:srgbClr val="0B3D2E"/>
                 </a:solidFill>
               </a:rPr>
-              <a:t>📝 Reto verificable</a:t>
+              <a:t>🧪 Laboratorio guiado</a:t>
             </a:r>
           </a:p>
         </p:txBody>
@@ -4696,22 +5057,97 @@
                   <a:srgbClr val="22282E"/>
                 </a:solidFill>
               </a:rPr>
-              <a:t>•  Entrega un informe completo de una muestra con las 11 secciones, IOCs estructurados, capa ATT&amp;CK, regla YARA y resumen ejecutivo, listo para su consumo por un SOC.</a:t>
-            </a:r>
-          </a:p>
-          <a:p>
-            <a:pPr>
-              <a:spcAft>
-                <a:spcPts val="600"/>
-              </a:spcAft>
-            </a:pPr>
-            <a:r>
-              <a:rPr sz="1500">
-                <a:solidFill>
-                  <a:srgbClr val="22282E"/>
-                </a:solidFill>
-              </a:rPr>
-              <a:t>•  Criterio de aceptación: un lector no técnico entiende el riesgo y la recomendación solo con el resumen ejecutivo, y un analista puede reproducir los hallazgos y desplegar los IOCs y la regla YARA adjuntos sin información adicional.</a:t>
+              <a:t>•  Redacta el informe completo de una muestra analizada en la parte:</a:t>
+            </a:r>
+          </a:p>
+          <a:p>
+            <a:pPr>
+              <a:spcAft>
+                <a:spcPts val="600"/>
+              </a:spcAft>
+            </a:pPr>
+            <a:r>
+              <a:rPr sz="1500">
+                <a:solidFill>
+                  <a:srgbClr val="22282E"/>
+                </a:solidFill>
+              </a:rPr>
+              <a:t>•  Portada y metadatos: nombre de la muestra, hashes (SHA-256, imphash), analista, fecha, TLP.</a:t>
+            </a:r>
+          </a:p>
+          <a:p>
+            <a:pPr>
+              <a:spcAft>
+                <a:spcPts val="600"/>
+              </a:spcAft>
+            </a:pPr>
+            <a:r>
+              <a:rPr sz="1500">
+                <a:solidFill>
+                  <a:srgbClr val="22282E"/>
+                </a:solidFill>
+              </a:rPr>
+              <a:t>•  Resumen ejecutivo (½ página): qué es, qué hace, impacto y recomendación principal, en lenguaje llano.</a:t>
+            </a:r>
+          </a:p>
+          <a:p>
+            <a:pPr>
+              <a:spcAft>
+                <a:spcPts val="600"/>
+              </a:spcAft>
+            </a:pPr>
+            <a:r>
+              <a:rPr sz="1500">
+                <a:solidFill>
+                  <a:srgbClr val="22282E"/>
+                </a:solidFill>
+              </a:rPr>
+              <a:t>•  Detalles de la muestra: tipo, familia, tamaño, packing, entorno de análisis (VM aislada).</a:t>
+            </a:r>
+          </a:p>
+          <a:p>
+            <a:pPr>
+              <a:spcAft>
+                <a:spcPts val="600"/>
+              </a:spcAft>
+            </a:pPr>
+            <a:r>
+              <a:rPr sz="1500">
+                <a:solidFill>
+                  <a:srgbClr val="22282E"/>
+                </a:solidFill>
+              </a:rPr>
+              <a:t>•  Análisis estático: strings clave, imports/capacidades, entropía, hallazgos del desensamblado.</a:t>
+            </a:r>
+          </a:p>
+          <a:p>
+            <a:pPr>
+              <a:spcAft>
+                <a:spcPts val="600"/>
+              </a:spcAft>
+            </a:pPr>
+            <a:r>
+              <a:rPr sz="1500">
+                <a:solidFill>
+                  <a:srgbClr val="22282E"/>
+                </a:solidFill>
+              </a:rPr>
+              <a:t>•  Análisis dinámico: árbol de procesos, persistencia, archivos/registro, mutex.</a:t>
+            </a:r>
+          </a:p>
+          <a:p>
+            <a:pPr>
+              <a:spcAft>
+                <a:spcPts val="600"/>
+              </a:spcAft>
+            </a:pPr>
+            <a:r>
+              <a:rPr sz="1500">
+                <a:solidFill>
+                  <a:srgbClr val="22282E"/>
+                </a:solidFill>
+              </a:rPr>
+              <a:t>•  Red y C2: protocolo, dominios/IPs, patrón de beacon, config extraída.</a:t>
             </a:r>
           </a:p>
         </p:txBody>
